--- a/public/fun/pack/pptx/weddingpro/결혼식프리미엄_28_식순중심_올리브브론즈.pptx
+++ b/public/fun/pack/pptx/weddingpro/결혼식프리미엄_28_식순중심_올리브브론즈.pptx
@@ -113,12 +113,12 @@
   <p:extLst>
     <p:ext uri="{521415D9-36F7-43E2-AB2F-B90AF26B5E84}">
       <p14:sectionLst xmlns:p14="http://schemas.microsoft.com/office/powerpoint/2010/main">
-        <p14:section name="시작" id="{77019D25-BEF6-4D09-B687-F31F676CBCCD}">
+        <p14:section name="시작" id="{872DD732-A59B-4598-B8A1-7C892DB8AB63}">
           <p14:sldIdLst>
             <p14:sldId id="256"/>
           </p14:sldIdLst>
         </p14:section>
-        <p14:section name="본문" id="{BC6123E2-FC1E-4B89-921F-362A88CAD28C}">
+        <p14:section name="본문" id="{3FB44AAD-DAD5-473D-BD4A-29F0AEA8B211}">
           <p14:sldIdLst>
             <p14:sldId id="257"/>
             <p14:sldId id="258"/>
@@ -127,7 +127,7 @@
             <p14:sldId id="261"/>
           </p14:sldIdLst>
         </p14:section>
-        <p14:section name="마무리" id="{26ACE0AC-87AC-4091-B491-E83B8574C333}">
+        <p14:section name="마무리" id="{96C4204E-529D-44A8-A482-84D317DF22EA}">
           <p14:sldIdLst>
             <p14:sldId id="262"/>
           </p14:sldIdLst>
@@ -2876,7 +2876,7 @@
             </a:lvl1pPr>
           </a:lstStyle>
           <a:p>
-            <a:fld id="{575B862D-0F0B-4F9F-9041-BBBE10EA031D}" type="slidenum">
+            <a:fld id="{1FDF1F2B-6299-47E0-B1EE-9125CD03021F}" type="slidenum">
               <a:rPr lang="en-US"/>
               <a:t>‹#›</a:t>
             </a:fld>
@@ -4907,7 +4907,7 @@
             </a:lvl1pPr>
           </a:lstStyle>
           <a:p>
-            <a:fld id="{CB3DF226-ED0D-4E9E-9495-F5CCBB18A6CB}" type="slidenum">
+            <a:fld id="{EC6714F0-DE57-4EC9-9407-502278005F65}" type="slidenum">
               <a:rPr lang="en-US"/>
               <a:t>‹#›</a:t>
             </a:fld>
@@ -5577,7 +5577,7 @@
             </a:lvl1pPr>
           </a:lstStyle>
           <a:p>
-            <a:fld id="{A1ADE893-0F4B-49F3-9954-FC4080656D91}" type="slidenum">
+            <a:fld id="{CB440A61-FBA6-49D1-95F3-A60B061F8F07}" type="slidenum">
               <a:rPr lang="en-US"/>
               <a:t>‹#›</a:t>
             </a:fld>
@@ -6446,7 +6446,7 @@
           <a:p>
             <a:r>
               <a:rPr lang="ko-KR"/>
-              <a:t>0000. 00. 00 · 예식장 이름</a:t>
+              <a:t>날짜 입력 · 예식장 이름</a:t>
             </a:r>
           </a:p>
         </p:txBody>
@@ -6681,7 +6681,7 @@
           <a:bodyPr/>
           <a:lstStyle/>
           <a:p>
-            <a:fld id="{5C2D92B8-4C4D-453A-827A-C902652770EC}" type="slidenum">
+            <a:fld id="{1D6DA5AE-95F7-4ED3-90A0-1799F48DBBBD}" type="slidenum">
               <a:rPr lang="en-US"/>
               <a:t>‹#›</a:t>
             </a:fld>
@@ -7125,7 +7125,7 @@
           <a:bodyPr/>
           <a:lstStyle/>
           <a:p>
-            <a:fld id="{A7D36A7D-545F-4BA2-94D9-F7B5898AE3E2}" type="slidenum">
+            <a:fld id="{9BC577FC-7AE6-41C5-9354-845E4F5E3756}" type="slidenum">
               <a:rPr lang="en-US"/>
               <a:t>‹#›</a:t>
             </a:fld>
@@ -7954,7 +7954,7 @@
           <a:bodyPr/>
           <a:lstStyle/>
           <a:p>
-            <a:fld id="{AFCEFE8C-8026-4209-8FC2-FA0B80D0EBF5}" type="slidenum">
+            <a:fld id="{2781CDD2-CA58-42EC-93BB-46D75F96AB51}" type="slidenum">
               <a:rPr lang="en-US"/>
               <a:t>‹#›</a:t>
             </a:fld>
@@ -9257,7 +9257,7 @@
           <a:bodyPr/>
           <a:lstStyle/>
           <a:p>
-            <a:fld id="{AF3223D2-812F-4A07-B82D-FDF3CB2DF267}" type="slidenum">
+            <a:fld id="{D762BB78-077D-4BBF-B5F5-8778D4D1622D}" type="slidenum">
               <a:rPr lang="en-US"/>
               <a:t>‹#›</a:t>
             </a:fld>
@@ -9345,7 +9345,7 @@
           <a:bodyPr/>
           <a:lstStyle/>
           <a:p>
-            <a:fld id="{2877D681-D29D-45BF-A1DD-F9227462955F}" type="slidenum">
+            <a:fld id="{F49E7608-E899-40BA-A8CE-6ACC46619C0F}" type="slidenum">
               <a:rPr lang="en-US"/>
               <a:t>‹#›</a:t>
             </a:fld>
